--- a/ppt/Prototype Submission Template _ Cortex Code CLI Hackathon.pptx
+++ b/ppt/Prototype Submission Template _ Cortex Code CLI Hackathon.pptx
@@ -7662,7 +7662,7 @@
               </a:defRPr>
             </a:pPr>
             <a:r>
-              <a:t>Data Source: MMS_DEMO.PUBLIC.MASTER_SHOT_TABLE (Snowflake) - 243K rows, 8 machines</a:t>
+              <a:t>Data Source: MMS_DEMO.PUBLIC.DEMO_SHOTS (Snowflake) - 243K rows, 8 machines</a:t>
             </a:r>
           </a:p>
           <a:p>
@@ -7695,7 +7695,7 @@
               </a:defRPr>
             </a:pPr>
             <a:r>
-              <a:t>Snowflake Tables (MASTER_SHOT_TABLE, MOLD, SHIFT_NOTE, WORK_ORDER),</a:t>
+              <a:t>Snowflake Tables (DEMO_SHOTS, MOLD, SHIFT_NOTE, WORK_ORDER),</a:t>
             </a:r>
           </a:p>
           <a:p>
